--- a/public/fun/pack/pptx/birthdaypro/돌잔치프리미엄_07_돌잡이중심_피치코퍼.pptx
+++ b/public/fun/pack/pptx/birthdaypro/돌잔치프리미엄_07_돌잡이중심_피치코퍼.pptx
@@ -112,12 +112,12 @@
   <p:extLst>
     <p:ext uri="{521415D9-36F7-43E2-AB2F-B90AF26B5E84}">
       <p14:sectionLst xmlns:p14="http://schemas.microsoft.com/office/powerpoint/2010/main">
-        <p14:section name="시작" id="{44140EB4-AE99-49B9-879E-8FB369B4D951}">
+        <p14:section name="시작" id="{B8A24537-3D6C-4978-99C1-5765F54C2B23}">
           <p14:sldIdLst>
             <p14:sldId id="256"/>
           </p14:sldIdLst>
         </p14:section>
-        <p14:section name="본문" id="{B749B913-B313-4154-A38D-F22C6476DF07}">
+        <p14:section name="본문" id="{A4E8CA06-F8AF-4E1C-9A03-43A8A7ECCACF}">
           <p14:sldIdLst>
             <p14:sldId id="257"/>
             <p14:sldId id="258"/>
@@ -125,7 +125,7 @@
             <p14:sldId id="260"/>
           </p14:sldIdLst>
         </p14:section>
-        <p14:section name="마무리" id="{93A4BA00-9A5E-47B1-AEEC-C666208F51B4}">
+        <p14:section name="마무리" id="{2FB287E1-5C19-4E91-B397-804AEAA9559C}">
           <p14:sldIdLst>
             <p14:sldId id="261"/>
           </p14:sldIdLst>
@@ -1500,7 +1500,7 @@
             </a:lvl1pPr>
           </a:lstStyle>
           <a:p>
-            <a:fld id="{3EAD6C8A-F5DD-4E65-9B06-4306FD608BA7}" type="slidenum">
+            <a:fld id="{D89C94FA-6979-4EC8-A24A-C1E920F09A13}" type="slidenum">
               <a:rPr lang="en-US"/>
               <a:t>‹#›</a:t>
             </a:fld>
@@ -2210,7 +2210,7 @@
             </a:lvl1pPr>
           </a:lstStyle>
           <a:p>
-            <a:fld id="{3C2505F6-4BCF-4558-B32D-CF9CECE2BF8E}" type="slidenum">
+            <a:fld id="{055F50EF-5DA8-4E48-8E91-56D9CB8DEFF9}" type="slidenum">
               <a:rPr lang="en-US"/>
               <a:t>‹#›</a:t>
             </a:fld>
@@ -2888,7 +2888,7 @@
             </a:lvl1pPr>
           </a:lstStyle>
           <a:p>
-            <a:fld id="{0E704FDC-82A7-4243-9583-069A2EC6175C}" type="slidenum">
+            <a:fld id="{FF7034E2-90BE-46DC-B295-C2C2095D489E}" type="slidenum">
               <a:rPr lang="en-US"/>
               <a:t>‹#›</a:t>
             </a:fld>
@@ -3751,7 +3751,7 @@
           <a:p>
             <a:r>
               <a:rPr lang="ko-KR"/>
-              <a:t>아기 이름 · 0000. 00. 00</a:t>
+              <a:t>아기 이름 · 날짜 입력</a:t>
             </a:r>
           </a:p>
           <a:p>
@@ -3912,7 +3912,7 @@
           <a:bodyPr/>
           <a:lstStyle/>
           <a:p>
-            <a:fld id="{1EE05C23-68D4-4117-9C85-A7F56F0A468A}" type="slidenum">
+            <a:fld id="{7AAF2070-DEE0-48F1-B743-A15366C7B5A8}" type="slidenum">
               <a:rPr lang="en-US"/>
               <a:t>‹#›</a:t>
             </a:fld>
@@ -4512,7 +4512,7 @@
           <a:bodyPr/>
           <a:lstStyle/>
           <a:p>
-            <a:fld id="{D765D74F-5270-4550-9069-CFA40D2F22AA}" type="slidenum">
+            <a:fld id="{6715F8B8-A36D-40D9-B0B6-4616CF496E12}" type="slidenum">
               <a:rPr lang="en-US"/>
               <a:t>‹#›</a:t>
             </a:fld>
@@ -5840,7 +5840,7 @@
           <a:bodyPr/>
           <a:lstStyle/>
           <a:p>
-            <a:fld id="{F522A87C-6450-4F01-B579-1E78B35B9A3A}" type="slidenum">
+            <a:fld id="{E9ECE444-686E-428B-A15C-919B374B74A3}" type="slidenum">
               <a:rPr lang="en-US"/>
               <a:t>‹#›</a:t>
             </a:fld>
@@ -6619,7 +6619,7 @@
           <a:bodyPr/>
           <a:lstStyle/>
           <a:p>
-            <a:fld id="{D4B0C5CE-E5BC-406E-8FD9-679D1953E256}" type="slidenum">
+            <a:fld id="{8C839D5D-5A3A-4793-80FE-0129F0AFDDFB}" type="slidenum">
               <a:rPr lang="en-US"/>
               <a:t>‹#›</a:t>
             </a:fld>
